--- a/Multi_Model_Agents_LangGraph_Training.pptx
+++ b/Multi_Model_Agents_LangGraph_Training.pptx
@@ -2192,7 +2192,7 @@
     <p:bg>
       <p:bgPr>
         <a:solidFill>
-          <a:srgbClr val="00623D"/>
+          <a:srgbClr val="FFFFFF"/>
         </a:solidFill>
       </p:bgPr>
     </p:bg>
@@ -2218,14 +2218,14 @@
         </p:nvSpPr>
         <p:spPr>
           <a:xfrm>
-            <a:off x="0" y="0"/>
-            <a:ext cx="12188952" cy="6858000"/>
-          </a:xfrm>
-          <a:prstGeom prst="rect">
+            <a:off x="9418320" y="-1463040"/>
+            <a:ext cx="4754880" cy="4754880"/>
+          </a:xfrm>
+          <a:prstGeom prst="ellipse">
             <a:avLst/>
           </a:prstGeom>
           <a:solidFill>
-            <a:srgbClr val="00623D"/>
+            <a:srgbClr val="E9F7F0"/>
           </a:solidFill>
           <a:ln/>
         </p:spPr>
@@ -2238,26 +2238,6 @@
         </p:nvSpPr>
         <p:spPr>
           <a:xfrm>
-            <a:off x="9418320" y="-1463040"/>
-            <a:ext cx="4754880" cy="4754880"/>
-          </a:xfrm>
-          <a:prstGeom prst="ellipse">
-            <a:avLst/>
-          </a:prstGeom>
-          <a:solidFill>
-            <a:srgbClr val="0C7A50"/>
-          </a:solidFill>
-          <a:ln/>
-        </p:spPr>
-      </p:sp>
-      <p:sp>
-        <p:nvSpPr>
-          <p:cNvPr id="4" name="Shape 2"/>
-          <p:cNvSpPr/>
-          <p:nvPr/>
-        </p:nvSpPr>
-        <p:spPr>
-          <a:xfrm>
             <a:off x="-1645920" y="4206240"/>
             <a:ext cx="4206240" cy="4206240"/>
           </a:xfrm>
@@ -2265,14 +2245,14 @@
             <a:avLst/>
           </a:prstGeom>
           <a:solidFill>
-            <a:srgbClr val="0C7A50"/>
+            <a:srgbClr val="E9F7F0"/>
           </a:solidFill>
           <a:ln/>
         </p:spPr>
       </p:sp>
       <p:sp>
         <p:nvSpPr>
-          <p:cNvPr id="5" name="Shape 3"/>
+          <p:cNvPr id="4" name="Shape 2"/>
           <p:cNvSpPr/>
           <p:nvPr/>
         </p:nvSpPr>
@@ -2292,7 +2272,7 @@
       </p:sp>
       <p:pic>
         <p:nvPicPr>
-          <p:cNvPr id="6" name="Image 0" descr="icon_brain.png">    </p:cNvPr>
+          <p:cNvPr id="5" name="Image 0" descr="icon_brain.png">    </p:cNvPr>
           <p:cNvPicPr>
             <a:picLocks noChangeAspect="1"/>
           </p:cNvPicPr>
@@ -2316,7 +2296,7 @@
       </p:pic>
       <p:sp>
         <p:nvSpPr>
-          <p:cNvPr id="7" name="Text 4"/>
+          <p:cNvPr id="6" name="Text 3"/>
           <p:cNvSpPr txBox="1"/>
           <p:nvPr/>
         </p:nvSpPr>
@@ -2341,7 +2321,7 @@
             <a:r>
               <a:rPr lang="en-US" sz="1300" b="1" spc="200" kern="0" dirty="0">
                 <a:solidFill>
-                  <a:srgbClr val="FFB800"/>
+                  <a:srgbClr val="00623D"/>
                 </a:solidFill>
                 <a:latin typeface="Calibri" pitchFamily="34" charset="0"/>
                 <a:ea typeface="Calibri" pitchFamily="34" charset="-122"/>
@@ -2355,7 +2335,7 @@
       </p:sp>
       <p:sp>
         <p:nvSpPr>
-          <p:cNvPr id="8" name="Text 5"/>
+          <p:cNvPr id="7" name="Text 4"/>
           <p:cNvSpPr txBox="1"/>
           <p:nvPr/>
         </p:nvSpPr>
@@ -2383,7 +2363,7 @@
             <a:r>
               <a:rPr lang="en-US" sz="4400" b="1" dirty="0">
                 <a:solidFill>
-                  <a:srgbClr val="FFFFFF"/>
+                  <a:srgbClr val="00623D"/>
                 </a:solidFill>
                 <a:latin typeface="Cambria" pitchFamily="34" charset="0"/>
                 <a:ea typeface="Cambria" pitchFamily="34" charset="-122"/>
@@ -2403,7 +2383,7 @@
             <a:r>
               <a:rPr lang="en-US" sz="4400" b="1" dirty="0">
                 <a:solidFill>
-                  <a:srgbClr val="FFFFFF"/>
+                  <a:srgbClr val="00623D"/>
                 </a:solidFill>
                 <a:latin typeface="Cambria" pitchFamily="34" charset="0"/>
                 <a:ea typeface="Cambria" pitchFamily="34" charset="-122"/>
@@ -2417,7 +2397,7 @@
       </p:sp>
       <p:sp>
         <p:nvSpPr>
-          <p:cNvPr id="9" name="Text 6"/>
+          <p:cNvPr id="8" name="Text 5"/>
           <p:cNvSpPr txBox="1"/>
           <p:nvPr/>
         </p:nvSpPr>
@@ -2442,7 +2422,7 @@
             <a:r>
               <a:rPr lang="en-US" sz="1500" dirty="0">
                 <a:solidFill>
-                  <a:srgbClr val="C9EEDD"/>
+                  <a:srgbClr val="5A7A6C"/>
                 </a:solidFill>
                 <a:latin typeface="Calibri" pitchFamily="34" charset="0"/>
                 <a:ea typeface="Calibri" pitchFamily="34" charset="-122"/>
@@ -2456,7 +2436,7 @@
       </p:sp>
       <p:sp>
         <p:nvSpPr>
-          <p:cNvPr id="10" name="Shape 7"/>
+          <p:cNvPr id="9" name="Shape 6"/>
           <p:cNvSpPr/>
           <p:nvPr/>
         </p:nvSpPr>
@@ -2479,7 +2459,7 @@
       </p:sp>
       <p:sp>
         <p:nvSpPr>
-          <p:cNvPr id="11" name="Text 8"/>
+          <p:cNvPr id="10" name="Text 7"/>
           <p:cNvSpPr txBox="1"/>
           <p:nvPr/>
         </p:nvSpPr>
@@ -2504,7 +2484,7 @@
             <a:r>
               <a:rPr lang="en-US" sz="1300" i="1" dirty="0">
                 <a:solidFill>
-                  <a:srgbClr val="FFFFFF"/>
+                  <a:srgbClr val="00623D"/>
                 </a:solidFill>
                 <a:latin typeface="Calibri" pitchFamily="34" charset="0"/>
                 <a:ea typeface="Calibri" pitchFamily="34" charset="-122"/>
@@ -2518,7 +2498,7 @@
       </p:sp>
       <p:sp>
         <p:nvSpPr>
-          <p:cNvPr id="12" name="Text 9"/>
+          <p:cNvPr id="11" name="Text 8"/>
           <p:cNvSpPr txBox="1"/>
           <p:nvPr/>
         </p:nvSpPr>
@@ -2543,7 +2523,7 @@
             <a:r>
               <a:rPr lang="en-US" sz="1100" dirty="0">
                 <a:solidFill>
-                  <a:srgbClr val="8FC9AC"/>
+                  <a:srgbClr val="5A7A6C"/>
                 </a:solidFill>
                 <a:latin typeface="Calibri" pitchFamily="34" charset="0"/>
                 <a:ea typeface="Calibri" pitchFamily="34" charset="-122"/>
@@ -3485,7 +3465,7 @@
     <p:bg>
       <p:bgPr>
         <a:solidFill>
-          <a:srgbClr val="00623D"/>
+          <a:srgbClr val="FFFFFF"/>
         </a:solidFill>
       </p:bgPr>
     </p:bg>
@@ -3518,7 +3498,7 @@
             <a:avLst/>
           </a:prstGeom>
           <a:solidFill>
-            <a:srgbClr val="0C7A50"/>
+            <a:srgbClr val="E9F7F0"/>
           </a:solidFill>
           <a:ln/>
         </p:spPr>
@@ -3594,7 +3574,7 @@
             <a:r>
               <a:rPr lang="en-US" sz="1300" b="1" spc="200" kern="0" dirty="0">
                 <a:solidFill>
-                  <a:srgbClr val="FFB800"/>
+                  <a:srgbClr val="00623D"/>
                 </a:solidFill>
                 <a:latin typeface="Calibri" pitchFamily="34" charset="0"/>
                 <a:ea typeface="Calibri" pitchFamily="34" charset="-122"/>
@@ -3633,7 +3613,7 @@
             <a:r>
               <a:rPr lang="en-US" sz="4000" b="1" dirty="0">
                 <a:solidFill>
-                  <a:srgbClr val="FFFFFF"/>
+                  <a:srgbClr val="00623D"/>
                 </a:solidFill>
                 <a:latin typeface="Cambria" pitchFamily="34" charset="0"/>
                 <a:ea typeface="Cambria" pitchFamily="34" charset="-122"/>
@@ -3650,7 +3630,7 @@
             <a:r>
               <a:rPr lang="en-US" sz="4000" b="1" dirty="0">
                 <a:solidFill>
-                  <a:srgbClr val="FFFFFF"/>
+                  <a:srgbClr val="00623D"/>
                 </a:solidFill>
                 <a:latin typeface="Cambria" pitchFamily="34" charset="0"/>
                 <a:ea typeface="Cambria" pitchFamily="34" charset="-122"/>
@@ -3689,7 +3669,7 @@
             <a:r>
               <a:rPr lang="en-US" sz="1400" dirty="0">
                 <a:solidFill>
-                  <a:srgbClr val="C9EEDD"/>
+                  <a:srgbClr val="5A7A6C"/>
                 </a:solidFill>
                 <a:latin typeface="Calibri" pitchFamily="34" charset="0"/>
                 <a:ea typeface="Calibri" pitchFamily="34" charset="-122"/>
@@ -3728,7 +3708,7 @@
             <a:r>
               <a:rPr lang="en-US" sz="900" dirty="0">
                 <a:solidFill>
-                  <a:srgbClr val="8FC9AC"/>
+                  <a:srgbClr val="A9C9B7"/>
                 </a:solidFill>
                 <a:latin typeface="Calibri" pitchFamily="34" charset="0"/>
                 <a:ea typeface="Calibri" pitchFamily="34" charset="-122"/>
@@ -3767,7 +3747,7 @@
             <a:r>
               <a:rPr lang="en-US" sz="900" dirty="0">
                 <a:solidFill>
-                  <a:srgbClr val="8FC9AC"/>
+                  <a:srgbClr val="A9C9B7"/>
                 </a:solidFill>
                 <a:latin typeface="Calibri" pitchFamily="34" charset="0"/>
                 <a:ea typeface="Calibri" pitchFamily="34" charset="-122"/>
@@ -4942,7 +4922,7 @@
     <p:bg>
       <p:bgPr>
         <a:solidFill>
-          <a:srgbClr val="F3FAF6"/>
+          <a:srgbClr val="FFFFFF"/>
         </a:solidFill>
       </p:bgPr>
     </p:bg>
@@ -6902,7 +6882,7 @@
     <p:bg>
       <p:bgPr>
         <a:solidFill>
-          <a:srgbClr val="00623D"/>
+          <a:srgbClr val="FFFFFF"/>
         </a:solidFill>
       </p:bgPr>
     </p:bg>
@@ -6991,7 +6971,7 @@
             <a:r>
               <a:rPr lang="en-US" sz="3000" b="1" dirty="0">
                 <a:solidFill>
-                  <a:srgbClr val="FFFFFF"/>
+                  <a:srgbClr val="00623D"/>
                 </a:solidFill>
                 <a:latin typeface="Cambria" pitchFamily="34" charset="0"/>
                 <a:ea typeface="Cambria" pitchFamily="34" charset="-122"/>
@@ -7018,7 +6998,7 @@
             <a:avLst/>
           </a:prstGeom>
           <a:solidFill>
-            <a:srgbClr val="FFB800"/>
+            <a:srgbClr val="00623D"/>
           </a:solidFill>
           <a:ln/>
         </p:spPr>
@@ -7050,7 +7030,7 @@
             <a:r>
               <a:rPr lang="en-US" sz="1400" b="1" dirty="0">
                 <a:solidFill>
-                  <a:srgbClr val="00623D"/>
+                  <a:srgbClr val="FFFFFF"/>
                 </a:solidFill>
                 <a:latin typeface="Cambria" pitchFamily="34" charset="0"/>
                 <a:ea typeface="Cambria" pitchFamily="34" charset="-122"/>
@@ -7089,7 +7069,7 @@
             <a:r>
               <a:rPr lang="en-US" sz="1500" b="1" dirty="0">
                 <a:solidFill>
-                  <a:srgbClr val="FFFFFF"/>
+                  <a:srgbClr val="00623D"/>
                 </a:solidFill>
                 <a:latin typeface="Calibri" pitchFamily="34" charset="0"/>
                 <a:ea typeface="Calibri" pitchFamily="34" charset="-122"/>
@@ -7128,7 +7108,7 @@
             <a:r>
               <a:rPr lang="en-US" sz="1200" dirty="0">
                 <a:solidFill>
-                  <a:srgbClr val="C9EEDD"/>
+                  <a:srgbClr val="5A7A6C"/>
                 </a:solidFill>
                 <a:latin typeface="Calibri" pitchFamily="34" charset="0"/>
                 <a:ea typeface="Calibri" pitchFamily="34" charset="-122"/>
@@ -7155,7 +7135,7 @@
             <a:avLst/>
           </a:prstGeom>
           <a:solidFill>
-            <a:srgbClr val="FFB800"/>
+            <a:srgbClr val="00623D"/>
           </a:solidFill>
           <a:ln/>
         </p:spPr>
@@ -7187,7 +7167,7 @@
             <a:r>
               <a:rPr lang="en-US" sz="1400" b="1" dirty="0">
                 <a:solidFill>
-                  <a:srgbClr val="00623D"/>
+                  <a:srgbClr val="FFFFFF"/>
                 </a:solidFill>
                 <a:latin typeface="Cambria" pitchFamily="34" charset="0"/>
                 <a:ea typeface="Cambria" pitchFamily="34" charset="-122"/>
@@ -7226,7 +7206,7 @@
             <a:r>
               <a:rPr lang="en-US" sz="1500" b="1" dirty="0">
                 <a:solidFill>
-                  <a:srgbClr val="FFFFFF"/>
+                  <a:srgbClr val="00623D"/>
                 </a:solidFill>
                 <a:latin typeface="Calibri" pitchFamily="34" charset="0"/>
                 <a:ea typeface="Calibri" pitchFamily="34" charset="-122"/>
@@ -7265,7 +7245,7 @@
             <a:r>
               <a:rPr lang="en-US" sz="1200" dirty="0">
                 <a:solidFill>
-                  <a:srgbClr val="C9EEDD"/>
+                  <a:srgbClr val="5A7A6C"/>
                 </a:solidFill>
                 <a:latin typeface="Calibri" pitchFamily="34" charset="0"/>
                 <a:ea typeface="Calibri" pitchFamily="34" charset="-122"/>
@@ -7292,7 +7272,7 @@
             <a:avLst/>
           </a:prstGeom>
           <a:solidFill>
-            <a:srgbClr val="FFB800"/>
+            <a:srgbClr val="00623D"/>
           </a:solidFill>
           <a:ln/>
         </p:spPr>
@@ -7324,7 +7304,7 @@
             <a:r>
               <a:rPr lang="en-US" sz="1400" b="1" dirty="0">
                 <a:solidFill>
-                  <a:srgbClr val="00623D"/>
+                  <a:srgbClr val="FFFFFF"/>
                 </a:solidFill>
                 <a:latin typeface="Cambria" pitchFamily="34" charset="0"/>
                 <a:ea typeface="Cambria" pitchFamily="34" charset="-122"/>
@@ -7363,7 +7343,7 @@
             <a:r>
               <a:rPr lang="en-US" sz="1500" b="1" dirty="0">
                 <a:solidFill>
-                  <a:srgbClr val="FFFFFF"/>
+                  <a:srgbClr val="00623D"/>
                 </a:solidFill>
                 <a:latin typeface="Calibri" pitchFamily="34" charset="0"/>
                 <a:ea typeface="Calibri" pitchFamily="34" charset="-122"/>
@@ -7402,7 +7382,7 @@
             <a:r>
               <a:rPr lang="en-US" sz="1200" dirty="0">
                 <a:solidFill>
-                  <a:srgbClr val="C9EEDD"/>
+                  <a:srgbClr val="5A7A6C"/>
                 </a:solidFill>
                 <a:latin typeface="Calibri" pitchFamily="34" charset="0"/>
                 <a:ea typeface="Calibri" pitchFamily="34" charset="-122"/>
@@ -7429,7 +7409,7 @@
             <a:avLst/>
           </a:prstGeom>
           <a:solidFill>
-            <a:srgbClr val="FFB800"/>
+            <a:srgbClr val="00623D"/>
           </a:solidFill>
           <a:ln/>
         </p:spPr>
@@ -7461,7 +7441,7 @@
             <a:r>
               <a:rPr lang="en-US" sz="1400" b="1" dirty="0">
                 <a:solidFill>
-                  <a:srgbClr val="00623D"/>
+                  <a:srgbClr val="FFFFFF"/>
                 </a:solidFill>
                 <a:latin typeface="Cambria" pitchFamily="34" charset="0"/>
                 <a:ea typeface="Cambria" pitchFamily="34" charset="-122"/>
@@ -7500,7 +7480,7 @@
             <a:r>
               <a:rPr lang="en-US" sz="1500" b="1" dirty="0">
                 <a:solidFill>
-                  <a:srgbClr val="FFFFFF"/>
+                  <a:srgbClr val="00623D"/>
                 </a:solidFill>
                 <a:latin typeface="Calibri" pitchFamily="34" charset="0"/>
                 <a:ea typeface="Calibri" pitchFamily="34" charset="-122"/>
@@ -7539,7 +7519,7 @@
             <a:r>
               <a:rPr lang="en-US" sz="1200" dirty="0">
                 <a:solidFill>
-                  <a:srgbClr val="C9EEDD"/>
+                  <a:srgbClr val="5A7A6C"/>
                 </a:solidFill>
                 <a:latin typeface="Calibri" pitchFamily="34" charset="0"/>
                 <a:ea typeface="Calibri" pitchFamily="34" charset="-122"/>
@@ -7578,7 +7558,7 @@
             <a:r>
               <a:rPr lang="en-US" sz="900" dirty="0">
                 <a:solidFill>
-                  <a:srgbClr val="8FC9AC"/>
+                  <a:srgbClr val="A9C9B7"/>
                 </a:solidFill>
                 <a:latin typeface="Calibri" pitchFamily="34" charset="0"/>
                 <a:ea typeface="Calibri" pitchFamily="34" charset="-122"/>
@@ -7617,7 +7597,7 @@
             <a:r>
               <a:rPr lang="en-US" sz="900" dirty="0">
                 <a:solidFill>
-                  <a:srgbClr val="8FC9AC"/>
+                  <a:srgbClr val="A9C9B7"/>
                 </a:solidFill>
                 <a:latin typeface="Calibri" pitchFamily="34" charset="0"/>
                 <a:ea typeface="Calibri" pitchFamily="34" charset="-122"/>
@@ -7643,7 +7623,7 @@
     <p:bg>
       <p:bgPr>
         <a:solidFill>
-          <a:srgbClr val="00623D"/>
+          <a:srgbClr val="FFFFFF"/>
         </a:solidFill>
       </p:bgPr>
     </p:bg>
@@ -7676,7 +7656,7 @@
             <a:avLst/>
           </a:prstGeom>
           <a:solidFill>
-            <a:srgbClr val="0C7A50"/>
+            <a:srgbClr val="E9F7F0"/>
           </a:solidFill>
           <a:ln/>
         </p:spPr>
@@ -7696,7 +7676,7 @@
             <a:avLst/>
           </a:prstGeom>
           <a:solidFill>
-            <a:srgbClr val="0C7A50"/>
+            <a:srgbClr val="E9F7F0"/>
           </a:solidFill>
           <a:ln/>
         </p:spPr>
@@ -7772,7 +7752,7 @@
             <a:r>
               <a:rPr lang="en-US" sz="4000" b="1" dirty="0">
                 <a:solidFill>
-                  <a:srgbClr val="FFFFFF"/>
+                  <a:srgbClr val="00623D"/>
                 </a:solidFill>
                 <a:latin typeface="Cambria" pitchFamily="34" charset="0"/>
                 <a:ea typeface="Cambria" pitchFamily="34" charset="-122"/>
@@ -7811,7 +7791,7 @@
             <a:r>
               <a:rPr lang="en-US" sz="1600" dirty="0">
                 <a:solidFill>
-                  <a:srgbClr val="C9EEDD"/>
+                  <a:srgbClr val="5A7A6C"/>
                 </a:solidFill>
                 <a:latin typeface="Calibri" pitchFamily="34" charset="0"/>
                 <a:ea typeface="Calibri" pitchFamily="34" charset="-122"/>
@@ -7840,7 +7820,7 @@
             </a:avLst>
           </a:prstGeom>
           <a:solidFill>
-            <a:srgbClr val="0A6B45"/>
+            <a:srgbClr val="F3FAF6"/>
           </a:solidFill>
           <a:ln/>
         </p:spPr>
@@ -7872,7 +7852,7 @@
             <a:r>
               <a:rPr lang="en-US" sz="1200" b="1" dirty="0">
                 <a:solidFill>
-                  <a:srgbClr val="FFB800"/>
+                  <a:srgbClr val="00623D"/>
                 </a:solidFill>
                 <a:latin typeface="Courier New" pitchFamily="34" charset="0"/>
                 <a:ea typeface="Courier New" pitchFamily="34" charset="-122"/>
@@ -7886,7 +7866,7 @@
             <a:r>
               <a:rPr lang="en-US" sz="1200" dirty="0">
                 <a:solidFill>
-                  <a:srgbClr val="FFFFFF"/>
+                  <a:srgbClr val="2B2B2B"/>
                 </a:solidFill>
                 <a:latin typeface="Courier New" pitchFamily="34" charset="0"/>
                 <a:ea typeface="Courier New" pitchFamily="34" charset="-122"/>
@@ -7901,7 +7881,7 @@
             <a:r>
               <a:rPr lang="en-US" sz="1200" b="1" dirty="0">
                 <a:solidFill>
-                  <a:srgbClr val="FFB800"/>
+                  <a:srgbClr val="00623D"/>
                 </a:solidFill>
                 <a:latin typeface="Courier New" pitchFamily="34" charset="0"/>
                 <a:ea typeface="Courier New" pitchFamily="34" charset="-122"/>
@@ -7918,7 +7898,7 @@
             <a:r>
               <a:rPr lang="en-US" sz="1200" dirty="0">
                 <a:solidFill>
-                  <a:srgbClr val="FFFFFF"/>
+                  <a:srgbClr val="2B2B2B"/>
                 </a:solidFill>
                 <a:latin typeface="Courier New" pitchFamily="34" charset="0"/>
                 <a:ea typeface="Courier New" pitchFamily="34" charset="-122"/>
@@ -7933,7 +7913,7 @@
             <a:r>
               <a:rPr lang="en-US" sz="1200" b="1" dirty="0">
                 <a:solidFill>
-                  <a:srgbClr val="FFB800"/>
+                  <a:srgbClr val="00623D"/>
                 </a:solidFill>
                 <a:latin typeface="Courier New" pitchFamily="34" charset="0"/>
                 <a:ea typeface="Courier New" pitchFamily="34" charset="-122"/>
@@ -7950,7 +7930,7 @@
             <a:r>
               <a:rPr lang="en-US" sz="1200" dirty="0">
                 <a:solidFill>
-                  <a:srgbClr val="FFFFFF"/>
+                  <a:srgbClr val="2B2B2B"/>
                 </a:solidFill>
                 <a:latin typeface="Courier New" pitchFamily="34" charset="0"/>
                 <a:ea typeface="Courier New" pitchFamily="34" charset="-122"/>
@@ -7989,7 +7969,7 @@
             <a:r>
               <a:rPr lang="en-US" sz="900" dirty="0">
                 <a:solidFill>
-                  <a:srgbClr val="8FC9AC"/>
+                  <a:srgbClr val="A9C9B7"/>
                 </a:solidFill>
                 <a:latin typeface="Calibri" pitchFamily="34" charset="0"/>
                 <a:ea typeface="Calibri" pitchFamily="34" charset="-122"/>
@@ -8028,7 +8008,7 @@
             <a:r>
               <a:rPr lang="en-US" sz="900" dirty="0">
                 <a:solidFill>
-                  <a:srgbClr val="8FC9AC"/>
+                  <a:srgbClr val="A9C9B7"/>
                 </a:solidFill>
                 <a:latin typeface="Calibri" pitchFamily="34" charset="0"/>
                 <a:ea typeface="Calibri" pitchFamily="34" charset="-122"/>
@@ -8054,7 +8034,7 @@
     <p:bg>
       <p:bgPr>
         <a:solidFill>
-          <a:srgbClr val="00623D"/>
+          <a:srgbClr val="FFFFFF"/>
         </a:solidFill>
       </p:bgPr>
     </p:bg>
@@ -8143,7 +8123,7 @@
             <a:r>
               <a:rPr lang="en-US" sz="3000" b="1" dirty="0">
                 <a:solidFill>
-                  <a:srgbClr val="FFFFFF"/>
+                  <a:srgbClr val="00623D"/>
                 </a:solidFill>
                 <a:latin typeface="Cambria" pitchFamily="34" charset="0"/>
                 <a:ea typeface="Cambria" pitchFamily="34" charset="-122"/>
@@ -8172,7 +8152,7 @@
             </a:avLst>
           </a:prstGeom>
           <a:solidFill>
-            <a:srgbClr val="0A6B45"/>
+            <a:srgbClr val="F3FAF6"/>
           </a:solidFill>
           <a:ln/>
           <a:effectLst>
@@ -8211,7 +8191,7 @@
             <a:r>
               <a:rPr lang="en-US" sz="3400" b="1" dirty="0">
                 <a:solidFill>
-                  <a:srgbClr val="2E8B67"/>
+                  <a:srgbClr val="BFE3D1"/>
                 </a:solidFill>
                 <a:latin typeface="Cambria" pitchFamily="34" charset="0"/>
                 <a:ea typeface="Cambria" pitchFamily="34" charset="-122"/>
@@ -8294,7 +8274,7 @@
             <a:r>
               <a:rPr lang="en-US" sz="1700" b="1" dirty="0">
                 <a:solidFill>
-                  <a:srgbClr val="FFFFFF"/>
+                  <a:srgbClr val="00623D"/>
                 </a:solidFill>
                 <a:latin typeface="Calibri" pitchFamily="34" charset="0"/>
                 <a:ea typeface="Calibri" pitchFamily="34" charset="-122"/>
@@ -8333,7 +8313,7 @@
             <a:r>
               <a:rPr lang="en-US" sz="1250" dirty="0">
                 <a:solidFill>
-                  <a:srgbClr val="C9EEDD"/>
+                  <a:srgbClr val="5A7A6C"/>
                 </a:solidFill>
                 <a:latin typeface="Calibri" pitchFamily="34" charset="0"/>
                 <a:ea typeface="Calibri" pitchFamily="34" charset="-122"/>
@@ -8362,7 +8342,7 @@
             </a:avLst>
           </a:prstGeom>
           <a:solidFill>
-            <a:srgbClr val="0A6B45"/>
+            <a:srgbClr val="F3FAF6"/>
           </a:solidFill>
           <a:ln/>
           <a:effectLst>
@@ -8401,7 +8381,7 @@
             <a:r>
               <a:rPr lang="en-US" sz="3400" b="1" dirty="0">
                 <a:solidFill>
-                  <a:srgbClr val="2E8B67"/>
+                  <a:srgbClr val="BFE3D1"/>
                 </a:solidFill>
                 <a:latin typeface="Cambria" pitchFamily="34" charset="0"/>
                 <a:ea typeface="Cambria" pitchFamily="34" charset="-122"/>
@@ -8484,7 +8464,7 @@
             <a:r>
               <a:rPr lang="en-US" sz="1700" b="1" dirty="0">
                 <a:solidFill>
-                  <a:srgbClr val="FFFFFF"/>
+                  <a:srgbClr val="00623D"/>
                 </a:solidFill>
                 <a:latin typeface="Calibri" pitchFamily="34" charset="0"/>
                 <a:ea typeface="Calibri" pitchFamily="34" charset="-122"/>
@@ -8523,7 +8503,7 @@
             <a:r>
               <a:rPr lang="en-US" sz="1250" dirty="0">
                 <a:solidFill>
-                  <a:srgbClr val="C9EEDD"/>
+                  <a:srgbClr val="5A7A6C"/>
                 </a:solidFill>
                 <a:latin typeface="Calibri" pitchFamily="34" charset="0"/>
                 <a:ea typeface="Calibri" pitchFamily="34" charset="-122"/>
@@ -8552,7 +8532,7 @@
             </a:avLst>
           </a:prstGeom>
           <a:solidFill>
-            <a:srgbClr val="0A6B45"/>
+            <a:srgbClr val="F3FAF6"/>
           </a:solidFill>
           <a:ln/>
           <a:effectLst>
@@ -8591,7 +8571,7 @@
             <a:r>
               <a:rPr lang="en-US" sz="3400" b="1" dirty="0">
                 <a:solidFill>
-                  <a:srgbClr val="2E8B67"/>
+                  <a:srgbClr val="BFE3D1"/>
                 </a:solidFill>
                 <a:latin typeface="Cambria" pitchFamily="34" charset="0"/>
                 <a:ea typeface="Cambria" pitchFamily="34" charset="-122"/>
@@ -8674,7 +8654,7 @@
             <a:r>
               <a:rPr lang="en-US" sz="1700" b="1" dirty="0">
                 <a:solidFill>
-                  <a:srgbClr val="FFFFFF"/>
+                  <a:srgbClr val="00623D"/>
                 </a:solidFill>
                 <a:latin typeface="Calibri" pitchFamily="34" charset="0"/>
                 <a:ea typeface="Calibri" pitchFamily="34" charset="-122"/>
@@ -8713,7 +8693,7 @@
             <a:r>
               <a:rPr lang="en-US" sz="1250" dirty="0">
                 <a:solidFill>
-                  <a:srgbClr val="C9EEDD"/>
+                  <a:srgbClr val="5A7A6C"/>
                 </a:solidFill>
                 <a:latin typeface="Calibri" pitchFamily="34" charset="0"/>
                 <a:ea typeface="Calibri" pitchFamily="34" charset="-122"/>
@@ -8752,7 +8732,7 @@
             <a:r>
               <a:rPr lang="en-US" sz="900" dirty="0">
                 <a:solidFill>
-                  <a:srgbClr val="8FC9AC"/>
+                  <a:srgbClr val="A9C9B7"/>
                 </a:solidFill>
                 <a:latin typeface="Calibri" pitchFamily="34" charset="0"/>
                 <a:ea typeface="Calibri" pitchFamily="34" charset="-122"/>
@@ -8791,7 +8771,7 @@
             <a:r>
               <a:rPr lang="en-US" sz="900" dirty="0">
                 <a:solidFill>
-                  <a:srgbClr val="8FC9AC"/>
+                  <a:srgbClr val="A9C9B7"/>
                 </a:solidFill>
                 <a:latin typeface="Calibri" pitchFamily="34" charset="0"/>
                 <a:ea typeface="Calibri" pitchFamily="34" charset="-122"/>
@@ -8817,7 +8797,7 @@
     <p:bg>
       <p:bgPr>
         <a:solidFill>
-          <a:srgbClr val="F3FAF6"/>
+          <a:srgbClr val="FFFFFF"/>
         </a:solidFill>
       </p:bgPr>
     </p:bg>
@@ -10684,7 +10664,7 @@
     <p:bg>
       <p:bgPr>
         <a:solidFill>
-          <a:srgbClr val="F3FAF6"/>
+          <a:srgbClr val="FFFFFF"/>
         </a:solidFill>
       </p:bgPr>
     </p:bg>
@@ -12140,13 +12120,13 @@
     <p:bg>
       <p:bgPr>
         <a:solidFill>
-          <a:srgbClr val="F3FAF6"/>
+          <a:srgbClr val="FFFFFF"/>
         </a:solidFill>
       </p:bgPr>
     </p:bg>
     <p:spTree>
       <p:nvGrpSpPr>
-        <p:cNvPr id="1" name=""/>
+        <p:cNvPr id="2" name=""/>
         <p:cNvGrpSpPr/>
         <p:nvPr/>
       </p:nvGrpSpPr>
@@ -12160,7 +12140,7 @@
       </p:grpSpPr>
       <p:sp>
         <p:nvSpPr>
-          <p:cNvPr id="2" name="Text 0"/>
+          <p:cNvPr id="3" name="Text 0"/>
           <p:cNvSpPr txBox="1"/>
           <p:nvPr/>
         </p:nvSpPr>
@@ -12199,7 +12179,7 @@
       </p:sp>
       <p:sp>
         <p:nvSpPr>
-          <p:cNvPr id="3" name="Text 1"/>
+          <p:cNvPr id="4" name="Text 1"/>
           <p:cNvSpPr txBox="1"/>
           <p:nvPr/>
         </p:nvSpPr>
@@ -12238,7 +12218,7 @@
       </p:sp>
       <p:graphicFrame>
         <p:nvGraphicFramePr>
-          <p:cNvPr id="8" name="Table 0"/>
+          <p:cNvPr id="5" name="Table 0"/>
           <p:cNvGraphicFramePr>
             <a:graphicFrameLocks noGrp="1"/>
           </p:cNvGraphicFramePr>
@@ -13093,7 +13073,7 @@
       </p:graphicFrame>
       <p:sp>
         <p:nvSpPr>
-          <p:cNvPr id="5" name="Shape 2"/>
+          <p:cNvPr id="6" name="Shape 2"/>
           <p:cNvSpPr/>
           <p:nvPr/>
         </p:nvSpPr>
@@ -13115,7 +13095,7 @@
       </p:sp>
       <p:sp>
         <p:nvSpPr>
-          <p:cNvPr id="6" name="Shape 3"/>
+          <p:cNvPr id="7" name="Shape 3"/>
           <p:cNvSpPr/>
           <p:nvPr/>
         </p:nvSpPr>
@@ -13135,7 +13115,7 @@
       </p:sp>
       <p:pic>
         <p:nvPicPr>
-          <p:cNvPr id="7" name="Image 0" descr="icon_target.png">    </p:cNvPr>
+          <p:cNvPr id="8" name="Image 0" descr="icon_target.png">    </p:cNvPr>
           <p:cNvPicPr>
             <a:picLocks noChangeAspect="1"/>
           </p:cNvPicPr>
@@ -13159,7 +13139,7 @@
       </p:pic>
       <p:sp>
         <p:nvSpPr>
-          <p:cNvPr id="8" name="Text 4"/>
+          <p:cNvPr id="9" name="Text 4"/>
           <p:cNvSpPr txBox="1"/>
           <p:nvPr/>
         </p:nvSpPr>
@@ -13198,7 +13178,7 @@
       </p:sp>
       <p:sp>
         <p:nvSpPr>
-          <p:cNvPr id="9" name="Text 5"/>
+          <p:cNvPr id="10" name="Text 5"/>
           <p:cNvSpPr txBox="1"/>
           <p:nvPr/>
         </p:nvSpPr>
@@ -13237,7 +13217,7 @@
       </p:sp>
       <p:sp>
         <p:nvSpPr>
-          <p:cNvPr id="10" name="Text 6"/>
+          <p:cNvPr id="11" name="Text 6"/>
           <p:cNvSpPr txBox="1"/>
           <p:nvPr/>
         </p:nvSpPr>
@@ -14041,7 +14021,7 @@
     <p:bg>
       <p:bgPr>
         <a:solidFill>
-          <a:srgbClr val="F3FAF6"/>
+          <a:srgbClr val="FFFFFF"/>
         </a:solidFill>
       </p:bgPr>
     </p:bg>
